--- a/CalendarioAgo2026/presentaciones/10_Graficas.pptx
+++ b/CalendarioAgo2026/presentaciones/10_Graficas.pptx
@@ -147,7 +147,7 @@
 <file path=ppt/revisionInfo.xml><?xml version="1.0" encoding="utf-8"?>
 <p1510:revInfo xmlns:a="http://schemas.openxmlformats.org/drawingml/2006/main" xmlns:r="http://schemas.openxmlformats.org/officeDocument/2006/relationships" xmlns:p1510="http://schemas.microsoft.com/office/powerpoint/2015/10/main">
   <p1510:revLst>
-    <p1510:client id="{C10D7C7D-E384-446E-8D66-107447B0BD57}" v="33" dt="2026-08-11T22:22:51.263"/>
+    <p1510:client id="{66BC6AA7-F17A-4243-9E48-9F3C452F086C}" v="2" dt="2026-08-30T19:23:53.320"/>
   </p1510:revLst>
 </p1510:revInfo>
 </file>
@@ -157,47 +157,16 @@
   <pc:docChgLst>
     <pc:chgData name="Lizethe Pérez Fuertes" userId="4ae9ef87-2a7d-42f8-8dfa-0a501a9e2ff4" providerId="ADAL" clId="{FDDD45CB-1330-4033-A842-3D2746AFF7C7}"/>
     <pc:docChg chg="undo custSel addSld delSld modSld">
-      <pc:chgData name="Lizethe Pérez Fuertes" userId="4ae9ef87-2a7d-42f8-8dfa-0a501a9e2ff4" providerId="ADAL" clId="{FDDD45CB-1330-4033-A842-3D2746AFF7C7}" dt="2026-08-11T22:24:03.631" v="922" actId="47"/>
+      <pc:chgData name="Lizethe Pérez Fuertes" userId="4ae9ef87-2a7d-42f8-8dfa-0a501a9e2ff4" providerId="ADAL" clId="{FDDD45CB-1330-4033-A842-3D2746AFF7C7}" dt="2026-08-30T19:24:06.136" v="936" actId="13926"/>
       <pc:docMkLst>
         <pc:docMk/>
       </pc:docMkLst>
-      <pc:sldChg chg="add del modNotes">
-        <pc:chgData name="Lizethe Pérez Fuertes" userId="4ae9ef87-2a7d-42f8-8dfa-0a501a9e2ff4" providerId="ADAL" clId="{FDDD45CB-1330-4033-A842-3D2746AFF7C7}" dt="2026-08-11T17:31:43.404" v="56" actId="47"/>
-        <pc:sldMkLst>
-          <pc:docMk/>
-          <pc:sldMk cId="0" sldId="256"/>
-        </pc:sldMkLst>
-      </pc:sldChg>
       <pc:sldChg chg="addSp delSp modSp mod">
         <pc:chgData name="Lizethe Pérez Fuertes" userId="4ae9ef87-2a7d-42f8-8dfa-0a501a9e2ff4" providerId="ADAL" clId="{FDDD45CB-1330-4033-A842-3D2746AFF7C7}" dt="2026-08-11T17:36:46.040" v="111" actId="20577"/>
         <pc:sldMkLst>
           <pc:docMk/>
           <pc:sldMk cId="0" sldId="257"/>
         </pc:sldMkLst>
-        <pc:spChg chg="del">
-          <ac:chgData name="Lizethe Pérez Fuertes" userId="4ae9ef87-2a7d-42f8-8dfa-0a501a9e2ff4" providerId="ADAL" clId="{FDDD45CB-1330-4033-A842-3D2746AFF7C7}" dt="2026-08-11T17:32:38.348" v="71" actId="478"/>
-          <ac:spMkLst>
-            <pc:docMk/>
-            <pc:sldMk cId="0" sldId="257"/>
-            <ac:spMk id="2" creationId="{00000000-0000-0000-0000-000000000000}"/>
-          </ac:spMkLst>
-        </pc:spChg>
-        <pc:spChg chg="del">
-          <ac:chgData name="Lizethe Pérez Fuertes" userId="4ae9ef87-2a7d-42f8-8dfa-0a501a9e2ff4" providerId="ADAL" clId="{FDDD45CB-1330-4033-A842-3D2746AFF7C7}" dt="2026-08-11T17:32:38.348" v="71" actId="478"/>
-          <ac:spMkLst>
-            <pc:docMk/>
-            <pc:sldMk cId="0" sldId="257"/>
-            <ac:spMk id="3" creationId="{00000000-0000-0000-0000-000000000000}"/>
-          </ac:spMkLst>
-        </pc:spChg>
-        <pc:spChg chg="del">
-          <ac:chgData name="Lizethe Pérez Fuertes" userId="4ae9ef87-2a7d-42f8-8dfa-0a501a9e2ff4" providerId="ADAL" clId="{FDDD45CB-1330-4033-A842-3D2746AFF7C7}" dt="2026-08-11T17:32:38.348" v="71" actId="478"/>
-          <ac:spMkLst>
-            <pc:docMk/>
-            <pc:sldMk cId="0" sldId="257"/>
-            <ac:spMk id="4" creationId="{00000000-0000-0000-0000-000000000000}"/>
-          </ac:spMkLst>
-        </pc:spChg>
         <pc:spChg chg="mod">
           <ac:chgData name="Lizethe Pérez Fuertes" userId="4ae9ef87-2a7d-42f8-8dfa-0a501a9e2ff4" providerId="ADAL" clId="{FDDD45CB-1330-4033-A842-3D2746AFF7C7}" dt="2026-08-11T17:36:46.040" v="111" actId="20577"/>
           <ac:spMkLst>
@@ -247,48 +216,12 @@
           </ac:picMkLst>
         </pc:picChg>
       </pc:sldChg>
-      <pc:sldChg chg="del">
-        <pc:chgData name="Lizethe Pérez Fuertes" userId="4ae9ef87-2a7d-42f8-8dfa-0a501a9e2ff4" providerId="ADAL" clId="{FDDD45CB-1330-4033-A842-3D2746AFF7C7}" dt="2026-08-11T22:24:03.631" v="922" actId="47"/>
-        <pc:sldMkLst>
-          <pc:docMk/>
-          <pc:sldMk cId="0" sldId="258"/>
-        </pc:sldMkLst>
-      </pc:sldChg>
-      <pc:sldChg chg="del">
-        <pc:chgData name="Lizethe Pérez Fuertes" userId="4ae9ef87-2a7d-42f8-8dfa-0a501a9e2ff4" providerId="ADAL" clId="{FDDD45CB-1330-4033-A842-3D2746AFF7C7}" dt="2026-08-11T22:24:03.631" v="922" actId="47"/>
-        <pc:sldMkLst>
-          <pc:docMk/>
-          <pc:sldMk cId="0" sldId="259"/>
-        </pc:sldMkLst>
-      </pc:sldChg>
-      <pc:sldChg chg="add del modNotes">
-        <pc:chgData name="Lizethe Pérez Fuertes" userId="4ae9ef87-2a7d-42f8-8dfa-0a501a9e2ff4" providerId="ADAL" clId="{FDDD45CB-1330-4033-A842-3D2746AFF7C7}" dt="2026-08-11T17:43:56.151" v="217" actId="47"/>
-        <pc:sldMkLst>
-          <pc:docMk/>
-          <pc:sldMk cId="0" sldId="260"/>
-        </pc:sldMkLst>
-      </pc:sldChg>
-      <pc:sldChg chg="add del modNotes">
-        <pc:chgData name="Lizethe Pérez Fuertes" userId="4ae9ef87-2a7d-42f8-8dfa-0a501a9e2ff4" providerId="ADAL" clId="{FDDD45CB-1330-4033-A842-3D2746AFF7C7}" dt="2026-08-11T17:47:50.317" v="265" actId="47"/>
-        <pc:sldMkLst>
-          <pc:docMk/>
-          <pc:sldMk cId="0" sldId="261"/>
-        </pc:sldMkLst>
-      </pc:sldChg>
       <pc:sldChg chg="addSp delSp modSp add mod modNotes">
         <pc:chgData name="Lizethe Pérez Fuertes" userId="4ae9ef87-2a7d-42f8-8dfa-0a501a9e2ff4" providerId="ADAL" clId="{FDDD45CB-1330-4033-A842-3D2746AFF7C7}" dt="2026-08-11T17:50:22.089" v="348" actId="1076"/>
         <pc:sldMkLst>
           <pc:docMk/>
           <pc:sldMk cId="0" sldId="264"/>
         </pc:sldMkLst>
-        <pc:spChg chg="del">
-          <ac:chgData name="Lizethe Pérez Fuertes" userId="4ae9ef87-2a7d-42f8-8dfa-0a501a9e2ff4" providerId="ADAL" clId="{FDDD45CB-1330-4033-A842-3D2746AFF7C7}" dt="2026-08-11T17:50:13.615" v="345" actId="478"/>
-          <ac:spMkLst>
-            <pc:docMk/>
-            <pc:sldMk cId="0" sldId="264"/>
-            <ac:spMk id="2" creationId="{00000000-0000-0000-0000-000000000000}"/>
-          </ac:spMkLst>
-        </pc:spChg>
         <pc:spChg chg="add mod">
           <ac:chgData name="Lizethe Pérez Fuertes" userId="4ae9ef87-2a7d-42f8-8dfa-0a501a9e2ff4" providerId="ADAL" clId="{FDDD45CB-1330-4033-A842-3D2746AFF7C7}" dt="2026-08-11T17:50:16.971" v="346" actId="1076"/>
           <ac:spMkLst>
@@ -314,27 +247,12 @@
           </ac:picMkLst>
         </pc:picChg>
       </pc:sldChg>
-      <pc:sldChg chg="add del modNotes">
-        <pc:chgData name="Lizethe Pérez Fuertes" userId="4ae9ef87-2a7d-42f8-8dfa-0a501a9e2ff4" providerId="ADAL" clId="{FDDD45CB-1330-4033-A842-3D2746AFF7C7}" dt="2026-08-11T18:10:54.539" v="644" actId="47"/>
-        <pc:sldMkLst>
-          <pc:docMk/>
-          <pc:sldMk cId="0" sldId="265"/>
-        </pc:sldMkLst>
-      </pc:sldChg>
       <pc:sldChg chg="addSp delSp modSp add mod modNotes">
         <pc:chgData name="Lizethe Pérez Fuertes" userId="4ae9ef87-2a7d-42f8-8dfa-0a501a9e2ff4" providerId="ADAL" clId="{FDDD45CB-1330-4033-A842-3D2746AFF7C7}" dt="2026-08-11T17:52:51.118" v="432" actId="1076"/>
         <pc:sldMkLst>
           <pc:docMk/>
           <pc:sldMk cId="0" sldId="266"/>
         </pc:sldMkLst>
-        <pc:spChg chg="del">
-          <ac:chgData name="Lizethe Pérez Fuertes" userId="4ae9ef87-2a7d-42f8-8dfa-0a501a9e2ff4" providerId="ADAL" clId="{FDDD45CB-1330-4033-A842-3D2746AFF7C7}" dt="2026-08-11T17:52:06.955" v="420" actId="478"/>
-          <ac:spMkLst>
-            <pc:docMk/>
-            <pc:sldMk cId="0" sldId="266"/>
-            <ac:spMk id="2" creationId="{00000000-0000-0000-0000-000000000000}"/>
-          </ac:spMkLst>
-        </pc:spChg>
         <pc:spChg chg="add mod">
           <ac:chgData name="Lizethe Pérez Fuertes" userId="4ae9ef87-2a7d-42f8-8dfa-0a501a9e2ff4" providerId="ADAL" clId="{FDDD45CB-1330-4033-A842-3D2746AFF7C7}" dt="2026-08-11T17:52:10.533" v="421" actId="1076"/>
           <ac:spMkLst>
@@ -360,80 +278,18 @@
           </ac:picMkLst>
         </pc:picChg>
       </pc:sldChg>
-      <pc:sldChg chg="del">
-        <pc:chgData name="Lizethe Pérez Fuertes" userId="4ae9ef87-2a7d-42f8-8dfa-0a501a9e2ff4" providerId="ADAL" clId="{FDDD45CB-1330-4033-A842-3D2746AFF7C7}" dt="2026-08-11T22:24:03.631" v="922" actId="47"/>
-        <pc:sldMkLst>
-          <pc:docMk/>
-          <pc:sldMk cId="0" sldId="267"/>
-        </pc:sldMkLst>
-      </pc:sldChg>
-      <pc:sldChg chg="del">
-        <pc:chgData name="Lizethe Pérez Fuertes" userId="4ae9ef87-2a7d-42f8-8dfa-0a501a9e2ff4" providerId="ADAL" clId="{FDDD45CB-1330-4033-A842-3D2746AFF7C7}" dt="2026-08-11T22:24:03.631" v="922" actId="47"/>
-        <pc:sldMkLst>
-          <pc:docMk/>
-          <pc:sldMk cId="0" sldId="268"/>
-        </pc:sldMkLst>
-      </pc:sldChg>
       <pc:sldChg chg="addSp delSp modSp add del mod modNotes">
         <pc:chgData name="Lizethe Pérez Fuertes" userId="4ae9ef87-2a7d-42f8-8dfa-0a501a9e2ff4" providerId="ADAL" clId="{FDDD45CB-1330-4033-A842-3D2746AFF7C7}" dt="2026-08-11T22:21:57.968" v="902" actId="47"/>
         <pc:sldMkLst>
           <pc:docMk/>
           <pc:sldMk cId="0" sldId="271"/>
         </pc:sldMkLst>
-        <pc:spChg chg="del">
-          <ac:chgData name="Lizethe Pérez Fuertes" userId="4ae9ef87-2a7d-42f8-8dfa-0a501a9e2ff4" providerId="ADAL" clId="{FDDD45CB-1330-4033-A842-3D2746AFF7C7}" dt="2026-08-11T22:15:55.555" v="860" actId="478"/>
-          <ac:spMkLst>
-            <pc:docMk/>
-            <pc:sldMk cId="0" sldId="271"/>
-            <ac:spMk id="2" creationId="{00000000-0000-0000-0000-000000000000}"/>
-          </ac:spMkLst>
-        </pc:spChg>
-        <pc:spChg chg="del mod">
-          <ac:chgData name="Lizethe Pérez Fuertes" userId="4ae9ef87-2a7d-42f8-8dfa-0a501a9e2ff4" providerId="ADAL" clId="{FDDD45CB-1330-4033-A842-3D2746AFF7C7}" dt="2026-08-11T22:21:19.256" v="892" actId="478"/>
-          <ac:spMkLst>
-            <pc:docMk/>
-            <pc:sldMk cId="0" sldId="271"/>
-            <ac:spMk id="3" creationId="{00000000-0000-0000-0000-000000000000}"/>
-          </ac:spMkLst>
-        </pc:spChg>
-        <pc:spChg chg="del">
-          <ac:chgData name="Lizethe Pérez Fuertes" userId="4ae9ef87-2a7d-42f8-8dfa-0a501a9e2ff4" providerId="ADAL" clId="{FDDD45CB-1330-4033-A842-3D2746AFF7C7}" dt="2026-08-11T22:15:58.338" v="861" actId="478"/>
-          <ac:spMkLst>
-            <pc:docMk/>
-            <pc:sldMk cId="0" sldId="271"/>
-            <ac:spMk id="4" creationId="{00000000-0000-0000-0000-000000000000}"/>
-          </ac:spMkLst>
-        </pc:spChg>
-        <pc:spChg chg="del">
-          <ac:chgData name="Lizethe Pérez Fuertes" userId="4ae9ef87-2a7d-42f8-8dfa-0a501a9e2ff4" providerId="ADAL" clId="{FDDD45CB-1330-4033-A842-3D2746AFF7C7}" dt="2026-08-11T22:14:59.002" v="857" actId="478"/>
-          <ac:spMkLst>
-            <pc:docMk/>
-            <pc:sldMk cId="0" sldId="271"/>
-            <ac:spMk id="8" creationId="{00000000-0000-0000-0000-000000000000}"/>
-          </ac:spMkLst>
-        </pc:spChg>
         <pc:spChg chg="add mod">
           <ac:chgData name="Lizethe Pérez Fuertes" userId="4ae9ef87-2a7d-42f8-8dfa-0a501a9e2ff4" providerId="ADAL" clId="{FDDD45CB-1330-4033-A842-3D2746AFF7C7}" dt="2026-08-11T22:20:26.732" v="884" actId="2711"/>
           <ac:spMkLst>
             <pc:docMk/>
             <pc:sldMk cId="0" sldId="271"/>
             <ac:spMk id="10" creationId="{4ACC8272-22AB-9EEA-C102-57557BF86DDE}"/>
-          </ac:spMkLst>
-        </pc:spChg>
-        <pc:spChg chg="add del">
-          <ac:chgData name="Lizethe Pérez Fuertes" userId="4ae9ef87-2a7d-42f8-8dfa-0a501a9e2ff4" providerId="ADAL" clId="{FDDD45CB-1330-4033-A842-3D2746AFF7C7}" dt="2026-08-11T22:20:46.458" v="886" actId="22"/>
-          <ac:spMkLst>
-            <pc:docMk/>
-            <pc:sldMk cId="0" sldId="271"/>
-            <ac:spMk id="12" creationId="{B3204B30-001F-440B-A1AE-5A2BBE8F3273}"/>
-          </ac:spMkLst>
-        </pc:spChg>
-        <pc:spChg chg="add del">
-          <ac:chgData name="Lizethe Pérez Fuertes" userId="4ae9ef87-2a7d-42f8-8dfa-0a501a9e2ff4" providerId="ADAL" clId="{FDDD45CB-1330-4033-A842-3D2746AFF7C7}" dt="2026-08-11T22:20:49.234" v="888" actId="22"/>
-          <ac:spMkLst>
-            <pc:docMk/>
-            <pc:sldMk cId="0" sldId="271"/>
-            <ac:spMk id="14" creationId="{25AEDEE4-A21F-413F-9BC4-D41211BA2F2E}"/>
           </ac:spMkLst>
         </pc:spChg>
         <pc:spChg chg="add mod">
@@ -444,75 +300,13 @@
             <ac:spMk id="15" creationId="{487D7397-7469-7D2C-0905-F67923A8DF2F}"/>
           </ac:spMkLst>
         </pc:spChg>
-        <pc:graphicFrameChg chg="del modGraphic">
-          <ac:chgData name="Lizethe Pérez Fuertes" userId="4ae9ef87-2a7d-42f8-8dfa-0a501a9e2ff4" providerId="ADAL" clId="{FDDD45CB-1330-4033-A842-3D2746AFF7C7}" dt="2026-08-11T22:06:04.882" v="790" actId="478"/>
-          <ac:graphicFrameMkLst>
-            <pc:docMk/>
-            <pc:sldMk cId="0" sldId="271"/>
-            <ac:graphicFrameMk id="5" creationId="{00000000-0000-0000-0000-000000000000}"/>
-          </ac:graphicFrameMkLst>
-        </pc:graphicFrameChg>
-        <pc:graphicFrameChg chg="del">
-          <ac:chgData name="Lizethe Pérez Fuertes" userId="4ae9ef87-2a7d-42f8-8dfa-0a501a9e2ff4" providerId="ADAL" clId="{FDDD45CB-1330-4033-A842-3D2746AFF7C7}" dt="2026-08-11T22:06:07.921" v="791" actId="478"/>
-          <ac:graphicFrameMkLst>
-            <pc:docMk/>
-            <pc:sldMk cId="0" sldId="271"/>
-            <ac:graphicFrameMk id="6" creationId="{00000000-0000-0000-0000-000000000000}"/>
-          </ac:graphicFrameMkLst>
-        </pc:graphicFrameChg>
-        <pc:graphicFrameChg chg="del">
-          <ac:chgData name="Lizethe Pérez Fuertes" userId="4ae9ef87-2a7d-42f8-8dfa-0a501a9e2ff4" providerId="ADAL" clId="{FDDD45CB-1330-4033-A842-3D2746AFF7C7}" dt="2026-08-11T22:06:10.465" v="792" actId="478"/>
-          <ac:graphicFrameMkLst>
-            <pc:docMk/>
-            <pc:sldMk cId="0" sldId="271"/>
-            <ac:graphicFrameMk id="7" creationId="{00000000-0000-0000-0000-000000000000}"/>
-          </ac:graphicFrameMkLst>
-        </pc:graphicFrameChg>
-      </pc:sldChg>
-      <pc:sldChg chg="del">
-        <pc:chgData name="Lizethe Pérez Fuertes" userId="4ae9ef87-2a7d-42f8-8dfa-0a501a9e2ff4" providerId="ADAL" clId="{FDDD45CB-1330-4033-A842-3D2746AFF7C7}" dt="2026-08-11T22:24:03.631" v="922" actId="47"/>
-        <pc:sldMkLst>
-          <pc:docMk/>
-          <pc:sldMk cId="0" sldId="272"/>
-        </pc:sldMkLst>
-      </pc:sldChg>
-      <pc:sldChg chg="del">
-        <pc:chgData name="Lizethe Pérez Fuertes" userId="4ae9ef87-2a7d-42f8-8dfa-0a501a9e2ff4" providerId="ADAL" clId="{FDDD45CB-1330-4033-A842-3D2746AFF7C7}" dt="2026-08-11T22:24:03.631" v="922" actId="47"/>
-        <pc:sldMkLst>
-          <pc:docMk/>
-          <pc:sldMk cId="0" sldId="273"/>
-        </pc:sldMkLst>
       </pc:sldChg>
       <pc:sldChg chg="addSp delSp modSp add mod modNotes">
-        <pc:chgData name="Lizethe Pérez Fuertes" userId="4ae9ef87-2a7d-42f8-8dfa-0a501a9e2ff4" providerId="ADAL" clId="{FDDD45CB-1330-4033-A842-3D2746AFF7C7}" dt="2026-08-11T22:23:48.546" v="921" actId="1076"/>
+        <pc:chgData name="Lizethe Pérez Fuertes" userId="4ae9ef87-2a7d-42f8-8dfa-0a501a9e2ff4" providerId="ADAL" clId="{FDDD45CB-1330-4033-A842-3D2746AFF7C7}" dt="2026-08-30T19:24:06.136" v="936" actId="13926"/>
         <pc:sldMkLst>
           <pc:docMk/>
           <pc:sldMk cId="0" sldId="275"/>
         </pc:sldMkLst>
-        <pc:spChg chg="del">
-          <ac:chgData name="Lizethe Pérez Fuertes" userId="4ae9ef87-2a7d-42f8-8dfa-0a501a9e2ff4" providerId="ADAL" clId="{FDDD45CB-1330-4033-A842-3D2746AFF7C7}" dt="2026-08-11T22:23:38.027" v="919" actId="478"/>
-          <ac:spMkLst>
-            <pc:docMk/>
-            <pc:sldMk cId="0" sldId="275"/>
-            <ac:spMk id="2" creationId="{00000000-0000-0000-0000-000000000000}"/>
-          </ac:spMkLst>
-        </pc:spChg>
-        <pc:spChg chg="del">
-          <ac:chgData name="Lizethe Pérez Fuertes" userId="4ae9ef87-2a7d-42f8-8dfa-0a501a9e2ff4" providerId="ADAL" clId="{FDDD45CB-1330-4033-A842-3D2746AFF7C7}" dt="2026-08-11T22:22:46.347" v="912" actId="478"/>
-          <ac:spMkLst>
-            <pc:docMk/>
-            <pc:sldMk cId="0" sldId="275"/>
-            <ac:spMk id="3" creationId="{00000000-0000-0000-0000-000000000000}"/>
-          </ac:spMkLst>
-        </pc:spChg>
-        <pc:spChg chg="del">
-          <ac:chgData name="Lizethe Pérez Fuertes" userId="4ae9ef87-2a7d-42f8-8dfa-0a501a9e2ff4" providerId="ADAL" clId="{FDDD45CB-1330-4033-A842-3D2746AFF7C7}" dt="2026-08-11T22:23:40.786" v="920" actId="478"/>
-          <ac:spMkLst>
-            <pc:docMk/>
-            <pc:sldMk cId="0" sldId="275"/>
-            <ac:spMk id="4" creationId="{00000000-0000-0000-0000-000000000000}"/>
-          </ac:spMkLst>
-        </pc:spChg>
         <pc:spChg chg="mod">
           <ac:chgData name="Lizethe Pérez Fuertes" userId="4ae9ef87-2a7d-42f8-8dfa-0a501a9e2ff4" providerId="ADAL" clId="{FDDD45CB-1330-4033-A842-3D2746AFF7C7}" dt="2026-08-11T22:23:29.981" v="918" actId="6549"/>
           <ac:spMkLst>
@@ -522,19 +316,11 @@
           </ac:spMkLst>
         </pc:spChg>
         <pc:spChg chg="mod">
-          <ac:chgData name="Lizethe Pérez Fuertes" userId="4ae9ef87-2a7d-42f8-8dfa-0a501a9e2ff4" providerId="ADAL" clId="{FDDD45CB-1330-4033-A842-3D2746AFF7C7}" dt="2026-08-11T22:23:48.546" v="921" actId="1076"/>
+          <ac:chgData name="Lizethe Pérez Fuertes" userId="4ae9ef87-2a7d-42f8-8dfa-0a501a9e2ff4" providerId="ADAL" clId="{FDDD45CB-1330-4033-A842-3D2746AFF7C7}" dt="2026-08-30T19:24:06.136" v="936" actId="13926"/>
           <ac:spMkLst>
             <pc:docMk/>
             <pc:sldMk cId="0" sldId="275"/>
             <ac:spMk id="7" creationId="{5BA0B139-C7E4-4F1F-A25F-814A0026FAA6}"/>
-          </ac:spMkLst>
-        </pc:spChg>
-        <pc:spChg chg="add del mod">
-          <ac:chgData name="Lizethe Pérez Fuertes" userId="4ae9ef87-2a7d-42f8-8dfa-0a501a9e2ff4" providerId="ADAL" clId="{FDDD45CB-1330-4033-A842-3D2746AFF7C7}" dt="2026-08-11T22:22:50.761" v="913" actId="478"/>
-          <ac:spMkLst>
-            <pc:docMk/>
-            <pc:sldMk cId="0" sldId="275"/>
-            <ac:spMk id="8" creationId="{32EA9444-AE5D-E414-8A40-2D334454B96C}"/>
           </ac:spMkLst>
         </pc:spChg>
         <pc:spChg chg="add mod">
@@ -546,27 +332,12 @@
           </ac:spMkLst>
         </pc:spChg>
       </pc:sldChg>
-      <pc:sldChg chg="add del modNotes">
-        <pc:chgData name="Lizethe Pérez Fuertes" userId="4ae9ef87-2a7d-42f8-8dfa-0a501a9e2ff4" providerId="ADAL" clId="{FDDD45CB-1330-4033-A842-3D2746AFF7C7}" dt="2026-08-11T22:24:03.631" v="922" actId="47"/>
-        <pc:sldMkLst>
-          <pc:docMk/>
-          <pc:sldMk cId="0" sldId="276"/>
-        </pc:sldMkLst>
-      </pc:sldChg>
       <pc:sldChg chg="addSp delSp modSp add mod modNotes">
         <pc:chgData name="Lizethe Pérez Fuertes" userId="4ae9ef87-2a7d-42f8-8dfa-0a501a9e2ff4" providerId="ADAL" clId="{FDDD45CB-1330-4033-A842-3D2746AFF7C7}" dt="2026-08-11T17:49:51.409" v="330" actId="1076"/>
         <pc:sldMkLst>
           <pc:docMk/>
           <pc:sldMk cId="1301067117" sldId="277"/>
         </pc:sldMkLst>
-        <pc:spChg chg="del">
-          <ac:chgData name="Lizethe Pérez Fuertes" userId="4ae9ef87-2a7d-42f8-8dfa-0a501a9e2ff4" providerId="ADAL" clId="{FDDD45CB-1330-4033-A842-3D2746AFF7C7}" dt="2026-08-11T17:48:35.883" v="302" actId="478"/>
-          <ac:spMkLst>
-            <pc:docMk/>
-            <pc:sldMk cId="1301067117" sldId="277"/>
-            <ac:spMk id="2" creationId="{00000000-0000-0000-0000-000000000000}"/>
-          </ac:spMkLst>
-        </pc:spChg>
         <pc:spChg chg="add mod">
           <ac:chgData name="Lizethe Pérez Fuertes" userId="4ae9ef87-2a7d-42f8-8dfa-0a501a9e2ff4" providerId="ADAL" clId="{FDDD45CB-1330-4033-A842-3D2746AFF7C7}" dt="2026-08-11T17:49:07.246" v="321" actId="6549"/>
           <ac:spMkLst>
@@ -614,78 +385,6 @@
           <pc:docMk/>
           <pc:sldMk cId="2034773782" sldId="278"/>
         </pc:sldMkLst>
-        <pc:spChg chg="del">
-          <ac:chgData name="Lizethe Pérez Fuertes" userId="4ae9ef87-2a7d-42f8-8dfa-0a501a9e2ff4" providerId="ADAL" clId="{FDDD45CB-1330-4033-A842-3D2746AFF7C7}" dt="2026-08-11T17:50:59.566" v="393" actId="478"/>
-          <ac:spMkLst>
-            <pc:docMk/>
-            <pc:sldMk cId="2034773782" sldId="278"/>
-            <ac:spMk id="2" creationId="{00000000-0000-0000-0000-000000000000}"/>
-          </ac:spMkLst>
-        </pc:spChg>
-        <pc:spChg chg="del">
-          <ac:chgData name="Lizethe Pérez Fuertes" userId="4ae9ef87-2a7d-42f8-8dfa-0a501a9e2ff4" providerId="ADAL" clId="{FDDD45CB-1330-4033-A842-3D2746AFF7C7}" dt="2026-08-11T17:51:03.329" v="394" actId="478"/>
-          <ac:spMkLst>
-            <pc:docMk/>
-            <pc:sldMk cId="2034773782" sldId="278"/>
-            <ac:spMk id="3" creationId="{00000000-0000-0000-0000-000000000000}"/>
-          </ac:spMkLst>
-        </pc:spChg>
-        <pc:spChg chg="del">
-          <ac:chgData name="Lizethe Pérez Fuertes" userId="4ae9ef87-2a7d-42f8-8dfa-0a501a9e2ff4" providerId="ADAL" clId="{FDDD45CB-1330-4033-A842-3D2746AFF7C7}" dt="2026-08-11T17:51:19.921" v="399" actId="478"/>
-          <ac:spMkLst>
-            <pc:docMk/>
-            <pc:sldMk cId="2034773782" sldId="278"/>
-            <ac:spMk id="4" creationId="{00000000-0000-0000-0000-000000000000}"/>
-          </ac:spMkLst>
-        </pc:spChg>
-        <pc:spChg chg="del">
-          <ac:chgData name="Lizethe Pérez Fuertes" userId="4ae9ef87-2a7d-42f8-8dfa-0a501a9e2ff4" providerId="ADAL" clId="{FDDD45CB-1330-4033-A842-3D2746AFF7C7}" dt="2026-08-11T17:51:17.987" v="398" actId="478"/>
-          <ac:spMkLst>
-            <pc:docMk/>
-            <pc:sldMk cId="2034773782" sldId="278"/>
-            <ac:spMk id="5" creationId="{00000000-0000-0000-0000-000000000000}"/>
-          </ac:spMkLst>
-        </pc:spChg>
-        <pc:spChg chg="del">
-          <ac:chgData name="Lizethe Pérez Fuertes" userId="4ae9ef87-2a7d-42f8-8dfa-0a501a9e2ff4" providerId="ADAL" clId="{FDDD45CB-1330-4033-A842-3D2746AFF7C7}" dt="2026-08-11T17:51:14.258" v="397" actId="478"/>
-          <ac:spMkLst>
-            <pc:docMk/>
-            <pc:sldMk cId="2034773782" sldId="278"/>
-            <ac:spMk id="6" creationId="{00000000-0000-0000-0000-000000000000}"/>
-          </ac:spMkLst>
-        </pc:spChg>
-        <pc:spChg chg="del">
-          <ac:chgData name="Lizethe Pérez Fuertes" userId="4ae9ef87-2a7d-42f8-8dfa-0a501a9e2ff4" providerId="ADAL" clId="{FDDD45CB-1330-4033-A842-3D2746AFF7C7}" dt="2026-08-11T17:51:09.729" v="396" actId="478"/>
-          <ac:spMkLst>
-            <pc:docMk/>
-            <pc:sldMk cId="2034773782" sldId="278"/>
-            <ac:spMk id="7" creationId="{00000000-0000-0000-0000-000000000000}"/>
-          </ac:spMkLst>
-        </pc:spChg>
-        <pc:spChg chg="del">
-          <ac:chgData name="Lizethe Pérez Fuertes" userId="4ae9ef87-2a7d-42f8-8dfa-0a501a9e2ff4" providerId="ADAL" clId="{FDDD45CB-1330-4033-A842-3D2746AFF7C7}" dt="2026-08-11T17:51:09.729" v="396" actId="478"/>
-          <ac:spMkLst>
-            <pc:docMk/>
-            <pc:sldMk cId="2034773782" sldId="278"/>
-            <ac:spMk id="8" creationId="{00000000-0000-0000-0000-000000000000}"/>
-          </ac:spMkLst>
-        </pc:spChg>
-        <pc:spChg chg="del">
-          <ac:chgData name="Lizethe Pérez Fuertes" userId="4ae9ef87-2a7d-42f8-8dfa-0a501a9e2ff4" providerId="ADAL" clId="{FDDD45CB-1330-4033-A842-3D2746AFF7C7}" dt="2026-08-11T17:51:24.618" v="402" actId="478"/>
-          <ac:spMkLst>
-            <pc:docMk/>
-            <pc:sldMk cId="2034773782" sldId="278"/>
-            <ac:spMk id="9" creationId="{00000000-0000-0000-0000-000000000000}"/>
-          </ac:spMkLst>
-        </pc:spChg>
-        <pc:spChg chg="del">
-          <ac:chgData name="Lizethe Pérez Fuertes" userId="4ae9ef87-2a7d-42f8-8dfa-0a501a9e2ff4" providerId="ADAL" clId="{FDDD45CB-1330-4033-A842-3D2746AFF7C7}" dt="2026-08-11T17:50:55.698" v="392" actId="478"/>
-          <ac:spMkLst>
-            <pc:docMk/>
-            <pc:sldMk cId="2034773782" sldId="278"/>
-            <ac:spMk id="10" creationId="{00000000-0000-0000-0000-000000000000}"/>
-          </ac:spMkLst>
-        </pc:spChg>
         <pc:spChg chg="add mod">
           <ac:chgData name="Lizethe Pérez Fuertes" userId="4ae9ef87-2a7d-42f8-8dfa-0a501a9e2ff4" providerId="ADAL" clId="{FDDD45CB-1330-4033-A842-3D2746AFF7C7}" dt="2026-08-11T17:51:37.566" v="406" actId="1076"/>
           <ac:spMkLst>
@@ -733,119 +432,6 @@
             <ac:picMk id="4" creationId="{22913B99-1562-5758-3EF2-43FC6F0AD7E1}"/>
           </ac:picMkLst>
         </pc:picChg>
-        <pc:picChg chg="del">
-          <ac:chgData name="Lizethe Pérez Fuertes" userId="4ae9ef87-2a7d-42f8-8dfa-0a501a9e2ff4" providerId="ADAL" clId="{FDDD45CB-1330-4033-A842-3D2746AFF7C7}" dt="2026-08-11T17:30:21.941" v="48" actId="478"/>
-          <ac:picMkLst>
-            <pc:docMk/>
-            <pc:sldMk cId="2553855534" sldId="289"/>
-            <ac:picMk id="5" creationId="{44BBD18F-0D6E-45EA-9199-2B7DCDB2D656}"/>
-          </ac:picMkLst>
-        </pc:picChg>
-      </pc:sldChg>
-      <pc:sldChg chg="del">
-        <pc:chgData name="Lizethe Pérez Fuertes" userId="4ae9ef87-2a7d-42f8-8dfa-0a501a9e2ff4" providerId="ADAL" clId="{FDDD45CB-1330-4033-A842-3D2746AFF7C7}" dt="2026-08-11T22:24:03.631" v="922" actId="47"/>
-        <pc:sldMkLst>
-          <pc:docMk/>
-          <pc:sldMk cId="1693141158" sldId="322"/>
-        </pc:sldMkLst>
-      </pc:sldChg>
-      <pc:sldChg chg="del">
-        <pc:chgData name="Lizethe Pérez Fuertes" userId="4ae9ef87-2a7d-42f8-8dfa-0a501a9e2ff4" providerId="ADAL" clId="{FDDD45CB-1330-4033-A842-3D2746AFF7C7}" dt="2026-08-11T22:24:03.631" v="922" actId="47"/>
-        <pc:sldMkLst>
-          <pc:docMk/>
-          <pc:sldMk cId="2794259143" sldId="327"/>
-        </pc:sldMkLst>
-      </pc:sldChg>
-      <pc:sldChg chg="del">
-        <pc:chgData name="Lizethe Pérez Fuertes" userId="4ae9ef87-2a7d-42f8-8dfa-0a501a9e2ff4" providerId="ADAL" clId="{FDDD45CB-1330-4033-A842-3D2746AFF7C7}" dt="2026-08-11T22:24:03.631" v="922" actId="47"/>
-        <pc:sldMkLst>
-          <pc:docMk/>
-          <pc:sldMk cId="0" sldId="328"/>
-        </pc:sldMkLst>
-      </pc:sldChg>
-      <pc:sldChg chg="del">
-        <pc:chgData name="Lizethe Pérez Fuertes" userId="4ae9ef87-2a7d-42f8-8dfa-0a501a9e2ff4" providerId="ADAL" clId="{FDDD45CB-1330-4033-A842-3D2746AFF7C7}" dt="2026-08-11T22:24:03.631" v="922" actId="47"/>
-        <pc:sldMkLst>
-          <pc:docMk/>
-          <pc:sldMk cId="0" sldId="329"/>
-        </pc:sldMkLst>
-      </pc:sldChg>
-      <pc:sldChg chg="del">
-        <pc:chgData name="Lizethe Pérez Fuertes" userId="4ae9ef87-2a7d-42f8-8dfa-0a501a9e2ff4" providerId="ADAL" clId="{FDDD45CB-1330-4033-A842-3D2746AFF7C7}" dt="2026-08-11T22:24:03.631" v="922" actId="47"/>
-        <pc:sldMkLst>
-          <pc:docMk/>
-          <pc:sldMk cId="0" sldId="330"/>
-        </pc:sldMkLst>
-      </pc:sldChg>
-      <pc:sldChg chg="del">
-        <pc:chgData name="Lizethe Pérez Fuertes" userId="4ae9ef87-2a7d-42f8-8dfa-0a501a9e2ff4" providerId="ADAL" clId="{FDDD45CB-1330-4033-A842-3D2746AFF7C7}" dt="2026-08-11T22:24:03.631" v="922" actId="47"/>
-        <pc:sldMkLst>
-          <pc:docMk/>
-          <pc:sldMk cId="0" sldId="331"/>
-        </pc:sldMkLst>
-      </pc:sldChg>
-      <pc:sldChg chg="del">
-        <pc:chgData name="Lizethe Pérez Fuertes" userId="4ae9ef87-2a7d-42f8-8dfa-0a501a9e2ff4" providerId="ADAL" clId="{FDDD45CB-1330-4033-A842-3D2746AFF7C7}" dt="2026-08-11T22:24:03.631" v="922" actId="47"/>
-        <pc:sldMkLst>
-          <pc:docMk/>
-          <pc:sldMk cId="0" sldId="332"/>
-        </pc:sldMkLst>
-      </pc:sldChg>
-      <pc:sldChg chg="del">
-        <pc:chgData name="Lizethe Pérez Fuertes" userId="4ae9ef87-2a7d-42f8-8dfa-0a501a9e2ff4" providerId="ADAL" clId="{FDDD45CB-1330-4033-A842-3D2746AFF7C7}" dt="2026-08-11T22:24:03.631" v="922" actId="47"/>
-        <pc:sldMkLst>
-          <pc:docMk/>
-          <pc:sldMk cId="0" sldId="333"/>
-        </pc:sldMkLst>
-      </pc:sldChg>
-      <pc:sldChg chg="del">
-        <pc:chgData name="Lizethe Pérez Fuertes" userId="4ae9ef87-2a7d-42f8-8dfa-0a501a9e2ff4" providerId="ADAL" clId="{FDDD45CB-1330-4033-A842-3D2746AFF7C7}" dt="2026-08-11T22:24:03.631" v="922" actId="47"/>
-        <pc:sldMkLst>
-          <pc:docMk/>
-          <pc:sldMk cId="0" sldId="334"/>
-        </pc:sldMkLst>
-      </pc:sldChg>
-      <pc:sldChg chg="del">
-        <pc:chgData name="Lizethe Pérez Fuertes" userId="4ae9ef87-2a7d-42f8-8dfa-0a501a9e2ff4" providerId="ADAL" clId="{FDDD45CB-1330-4033-A842-3D2746AFF7C7}" dt="2026-08-11T22:24:03.631" v="922" actId="47"/>
-        <pc:sldMkLst>
-          <pc:docMk/>
-          <pc:sldMk cId="0" sldId="335"/>
-        </pc:sldMkLst>
-      </pc:sldChg>
-      <pc:sldChg chg="del">
-        <pc:chgData name="Lizethe Pérez Fuertes" userId="4ae9ef87-2a7d-42f8-8dfa-0a501a9e2ff4" providerId="ADAL" clId="{FDDD45CB-1330-4033-A842-3D2746AFF7C7}" dt="2026-08-11T22:24:03.631" v="922" actId="47"/>
-        <pc:sldMkLst>
-          <pc:docMk/>
-          <pc:sldMk cId="0" sldId="336"/>
-        </pc:sldMkLst>
-      </pc:sldChg>
-      <pc:sldChg chg="del">
-        <pc:chgData name="Lizethe Pérez Fuertes" userId="4ae9ef87-2a7d-42f8-8dfa-0a501a9e2ff4" providerId="ADAL" clId="{FDDD45CB-1330-4033-A842-3D2746AFF7C7}" dt="2026-08-11T22:24:03.631" v="922" actId="47"/>
-        <pc:sldMkLst>
-          <pc:docMk/>
-          <pc:sldMk cId="0" sldId="337"/>
-        </pc:sldMkLst>
-      </pc:sldChg>
-      <pc:sldChg chg="add del modNotes">
-        <pc:chgData name="Lizethe Pérez Fuertes" userId="4ae9ef87-2a7d-42f8-8dfa-0a501a9e2ff4" providerId="ADAL" clId="{FDDD45CB-1330-4033-A842-3D2746AFF7C7}" dt="2026-08-11T17:38:36.060" v="127" actId="47"/>
-        <pc:sldMkLst>
-          <pc:docMk/>
-          <pc:sldMk cId="0" sldId="338"/>
-        </pc:sldMkLst>
-      </pc:sldChg>
-      <pc:sldChg chg="add del modNotes">
-        <pc:chgData name="Lizethe Pérez Fuertes" userId="4ae9ef87-2a7d-42f8-8dfa-0a501a9e2ff4" providerId="ADAL" clId="{FDDD45CB-1330-4033-A842-3D2746AFF7C7}" dt="2026-08-11T17:38:39.399" v="128" actId="47"/>
-        <pc:sldMkLst>
-          <pc:docMk/>
-          <pc:sldMk cId="0" sldId="339"/>
-        </pc:sldMkLst>
-      </pc:sldChg>
-      <pc:sldChg chg="add del modNotes">
-        <pc:chgData name="Lizethe Pérez Fuertes" userId="4ae9ef87-2a7d-42f8-8dfa-0a501a9e2ff4" providerId="ADAL" clId="{FDDD45CB-1330-4033-A842-3D2746AFF7C7}" dt="2026-08-11T17:43:56.151" v="217" actId="47"/>
-        <pc:sldMkLst>
-          <pc:docMk/>
-          <pc:sldMk cId="0" sldId="340"/>
-        </pc:sldMkLst>
       </pc:sldChg>
       <pc:sldChg chg="addSp delSp modSp add mod modNotes">
         <pc:chgData name="Lizethe Pérez Fuertes" userId="4ae9ef87-2a7d-42f8-8dfa-0a501a9e2ff4" providerId="ADAL" clId="{FDDD45CB-1330-4033-A842-3D2746AFF7C7}" dt="2026-08-11T17:48:25.628" v="301" actId="1036"/>
@@ -853,14 +439,6 @@
           <pc:docMk/>
           <pc:sldMk cId="2699005820" sldId="341"/>
         </pc:sldMkLst>
-        <pc:spChg chg="del mod">
-          <ac:chgData name="Lizethe Pérez Fuertes" userId="4ae9ef87-2a7d-42f8-8dfa-0a501a9e2ff4" providerId="ADAL" clId="{FDDD45CB-1330-4033-A842-3D2746AFF7C7}" dt="2026-08-11T17:47:58.059" v="267" actId="478"/>
-          <ac:spMkLst>
-            <pc:docMk/>
-            <pc:sldMk cId="2699005820" sldId="341"/>
-            <ac:spMk id="2" creationId="{00000000-0000-0000-0000-000000000000}"/>
-          </ac:spMkLst>
-        </pc:spChg>
         <pc:spChg chg="add mod">
           <ac:chgData name="Lizethe Pérez Fuertes" userId="4ae9ef87-2a7d-42f8-8dfa-0a501a9e2ff4" providerId="ADAL" clId="{FDDD45CB-1330-4033-A842-3D2746AFF7C7}" dt="2026-08-11T17:48:16.713" v="292" actId="20577"/>
           <ac:spMkLst>
@@ -885,148 +463,6 @@
             <ac:picMk id="14" creationId="{B7C3837E-4D62-005A-93FA-7E31678ECED1}"/>
           </ac:picMkLst>
         </pc:picChg>
-      </pc:sldChg>
-      <pc:sldChg chg="addSp delSp modSp add del mod modNotes">
-        <pc:chgData name="Lizethe Pérez Fuertes" userId="4ae9ef87-2a7d-42f8-8dfa-0a501a9e2ff4" providerId="ADAL" clId="{FDDD45CB-1330-4033-A842-3D2746AFF7C7}" dt="2026-08-11T18:09:03.675" v="580" actId="47"/>
-        <pc:sldMkLst>
-          <pc:docMk/>
-          <pc:sldMk cId="0" sldId="342"/>
-        </pc:sldMkLst>
-        <pc:spChg chg="del">
-          <ac:chgData name="Lizethe Pérez Fuertes" userId="4ae9ef87-2a7d-42f8-8dfa-0a501a9e2ff4" providerId="ADAL" clId="{FDDD45CB-1330-4033-A842-3D2746AFF7C7}" dt="2026-08-11T17:53:34.264" v="434" actId="478"/>
-          <ac:spMkLst>
-            <pc:docMk/>
-            <pc:sldMk cId="0" sldId="342"/>
-            <ac:spMk id="2" creationId="{00000000-0000-0000-0000-000000000000}"/>
-          </ac:spMkLst>
-        </pc:spChg>
-        <pc:spChg chg="del">
-          <ac:chgData name="Lizethe Pérez Fuertes" userId="4ae9ef87-2a7d-42f8-8dfa-0a501a9e2ff4" providerId="ADAL" clId="{FDDD45CB-1330-4033-A842-3D2746AFF7C7}" dt="2026-08-11T17:53:32.142" v="433" actId="478"/>
-          <ac:spMkLst>
-            <pc:docMk/>
-            <pc:sldMk cId="0" sldId="342"/>
-            <ac:spMk id="3" creationId="{00000000-0000-0000-0000-000000000000}"/>
-          </ac:spMkLst>
-        </pc:spChg>
-        <pc:spChg chg="del">
-          <ac:chgData name="Lizethe Pérez Fuertes" userId="4ae9ef87-2a7d-42f8-8dfa-0a501a9e2ff4" providerId="ADAL" clId="{FDDD45CB-1330-4033-A842-3D2746AFF7C7}" dt="2026-08-11T17:53:39.436" v="435" actId="478"/>
-          <ac:spMkLst>
-            <pc:docMk/>
-            <pc:sldMk cId="0" sldId="342"/>
-            <ac:spMk id="4" creationId="{00000000-0000-0000-0000-000000000000}"/>
-          </ac:spMkLst>
-        </pc:spChg>
-        <pc:spChg chg="del">
-          <ac:chgData name="Lizethe Pérez Fuertes" userId="4ae9ef87-2a7d-42f8-8dfa-0a501a9e2ff4" providerId="ADAL" clId="{FDDD45CB-1330-4033-A842-3D2746AFF7C7}" dt="2026-08-11T17:53:39.436" v="435" actId="478"/>
-          <ac:spMkLst>
-            <pc:docMk/>
-            <pc:sldMk cId="0" sldId="342"/>
-            <ac:spMk id="5" creationId="{00000000-0000-0000-0000-000000000000}"/>
-          </ac:spMkLst>
-        </pc:spChg>
-        <pc:spChg chg="del">
-          <ac:chgData name="Lizethe Pérez Fuertes" userId="4ae9ef87-2a7d-42f8-8dfa-0a501a9e2ff4" providerId="ADAL" clId="{FDDD45CB-1330-4033-A842-3D2746AFF7C7}" dt="2026-08-11T17:53:39.436" v="435" actId="478"/>
-          <ac:spMkLst>
-            <pc:docMk/>
-            <pc:sldMk cId="0" sldId="342"/>
-            <ac:spMk id="6" creationId="{00000000-0000-0000-0000-000000000000}"/>
-          </ac:spMkLst>
-        </pc:spChg>
-        <pc:spChg chg="del">
-          <ac:chgData name="Lizethe Pérez Fuertes" userId="4ae9ef87-2a7d-42f8-8dfa-0a501a9e2ff4" providerId="ADAL" clId="{FDDD45CB-1330-4033-A842-3D2746AFF7C7}" dt="2026-08-11T17:53:39.436" v="435" actId="478"/>
-          <ac:spMkLst>
-            <pc:docMk/>
-            <pc:sldMk cId="0" sldId="342"/>
-            <ac:spMk id="7" creationId="{00000000-0000-0000-0000-000000000000}"/>
-          </ac:spMkLst>
-        </pc:spChg>
-        <pc:spChg chg="del">
-          <ac:chgData name="Lizethe Pérez Fuertes" userId="4ae9ef87-2a7d-42f8-8dfa-0a501a9e2ff4" providerId="ADAL" clId="{FDDD45CB-1330-4033-A842-3D2746AFF7C7}" dt="2026-08-11T17:53:39.436" v="435" actId="478"/>
-          <ac:spMkLst>
-            <pc:docMk/>
-            <pc:sldMk cId="0" sldId="342"/>
-            <ac:spMk id="8" creationId="{00000000-0000-0000-0000-000000000000}"/>
-          </ac:spMkLst>
-        </pc:spChg>
-        <pc:spChg chg="del">
-          <ac:chgData name="Lizethe Pérez Fuertes" userId="4ae9ef87-2a7d-42f8-8dfa-0a501a9e2ff4" providerId="ADAL" clId="{FDDD45CB-1330-4033-A842-3D2746AFF7C7}" dt="2026-08-11T17:53:39.436" v="435" actId="478"/>
-          <ac:spMkLst>
-            <pc:docMk/>
-            <pc:sldMk cId="0" sldId="342"/>
-            <ac:spMk id="9" creationId="{00000000-0000-0000-0000-000000000000}"/>
-          </ac:spMkLst>
-        </pc:spChg>
-        <pc:spChg chg="mod">
-          <ac:chgData name="Lizethe Pérez Fuertes" userId="4ae9ef87-2a7d-42f8-8dfa-0a501a9e2ff4" providerId="ADAL" clId="{FDDD45CB-1330-4033-A842-3D2746AFF7C7}" dt="2026-08-11T17:56:27.530" v="458" actId="1076"/>
-          <ac:spMkLst>
-            <pc:docMk/>
-            <pc:sldMk cId="0" sldId="342"/>
-            <ac:spMk id="10" creationId="{00000000-0000-0000-0000-000000000000}"/>
-          </ac:spMkLst>
-        </pc:spChg>
-        <pc:spChg chg="mod">
-          <ac:chgData name="Lizethe Pérez Fuertes" userId="4ae9ef87-2a7d-42f8-8dfa-0a501a9e2ff4" providerId="ADAL" clId="{FDDD45CB-1330-4033-A842-3D2746AFF7C7}" dt="2026-08-11T17:56:27.530" v="458" actId="1076"/>
-          <ac:spMkLst>
-            <pc:docMk/>
-            <pc:sldMk cId="0" sldId="342"/>
-            <ac:spMk id="12" creationId="{00000000-0000-0000-0000-000000000000}"/>
-          </ac:spMkLst>
-        </pc:spChg>
-        <pc:spChg chg="mod">
-          <ac:chgData name="Lizethe Pérez Fuertes" userId="4ae9ef87-2a7d-42f8-8dfa-0a501a9e2ff4" providerId="ADAL" clId="{FDDD45CB-1330-4033-A842-3D2746AFF7C7}" dt="2026-08-11T17:56:27.530" v="458" actId="1076"/>
-          <ac:spMkLst>
-            <pc:docMk/>
-            <pc:sldMk cId="0" sldId="342"/>
-            <ac:spMk id="13" creationId="{00000000-0000-0000-0000-000000000000}"/>
-          </ac:spMkLst>
-        </pc:spChg>
-        <pc:spChg chg="mod">
-          <ac:chgData name="Lizethe Pérez Fuertes" userId="4ae9ef87-2a7d-42f8-8dfa-0a501a9e2ff4" providerId="ADAL" clId="{FDDD45CB-1330-4033-A842-3D2746AFF7C7}" dt="2026-08-11T17:56:27.530" v="458" actId="1076"/>
-          <ac:spMkLst>
-            <pc:docMk/>
-            <pc:sldMk cId="0" sldId="342"/>
-            <ac:spMk id="17" creationId="{CEF79DDC-FCAE-D362-53B9-577344693611}"/>
-          </ac:spMkLst>
-        </pc:spChg>
-        <pc:spChg chg="add mod">
-          <ac:chgData name="Lizethe Pérez Fuertes" userId="4ae9ef87-2a7d-42f8-8dfa-0a501a9e2ff4" providerId="ADAL" clId="{FDDD45CB-1330-4033-A842-3D2746AFF7C7}" dt="2026-08-11T17:58:38.915" v="528" actId="6549"/>
-          <ac:spMkLst>
-            <pc:docMk/>
-            <pc:sldMk cId="0" sldId="342"/>
-            <ac:spMk id="18" creationId="{B29B043D-2CBF-BB1B-034F-6203AF294B70}"/>
-          </ac:spMkLst>
-        </pc:spChg>
-        <pc:grpChg chg="mod">
-          <ac:chgData name="Lizethe Pérez Fuertes" userId="4ae9ef87-2a7d-42f8-8dfa-0a501a9e2ff4" providerId="ADAL" clId="{FDDD45CB-1330-4033-A842-3D2746AFF7C7}" dt="2026-08-11T17:56:27.530" v="458" actId="1076"/>
-          <ac:grpSpMkLst>
-            <pc:docMk/>
-            <pc:sldMk cId="0" sldId="342"/>
-            <ac:grpSpMk id="15" creationId="{66AB6F70-ACBC-B1D6-4A7E-D187FCA5FED4}"/>
-          </ac:grpSpMkLst>
-        </pc:grpChg>
-        <pc:graphicFrameChg chg="add del mod">
-          <ac:chgData name="Lizethe Pérez Fuertes" userId="4ae9ef87-2a7d-42f8-8dfa-0a501a9e2ff4" providerId="ADAL" clId="{FDDD45CB-1330-4033-A842-3D2746AFF7C7}" dt="2026-08-11T18:05:51.794" v="554" actId="478"/>
-          <ac:graphicFrameMkLst>
-            <pc:docMk/>
-            <pc:sldMk cId="0" sldId="342"/>
-            <ac:graphicFrameMk id="19" creationId="{D4EF6A07-071D-1461-B801-259FB7087EBD}"/>
-          </ac:graphicFrameMkLst>
-        </pc:graphicFrameChg>
-        <pc:graphicFrameChg chg="add mod">
-          <ac:chgData name="Lizethe Pérez Fuertes" userId="4ae9ef87-2a7d-42f8-8dfa-0a501a9e2ff4" providerId="ADAL" clId="{FDDD45CB-1330-4033-A842-3D2746AFF7C7}" dt="2026-08-11T18:06:22.900" v="555"/>
-          <ac:graphicFrameMkLst>
-            <pc:docMk/>
-            <pc:sldMk cId="0" sldId="342"/>
-            <ac:graphicFrameMk id="20" creationId="{DB64BA9D-ED72-25E2-322D-9633A5DCE234}"/>
-          </ac:graphicFrameMkLst>
-        </pc:graphicFrameChg>
-      </pc:sldChg>
-      <pc:sldChg chg="add del modNotes">
-        <pc:chgData name="Lizethe Pérez Fuertes" userId="4ae9ef87-2a7d-42f8-8dfa-0a501a9e2ff4" providerId="ADAL" clId="{FDDD45CB-1330-4033-A842-3D2746AFF7C7}" dt="2026-08-11T22:22:06.160" v="904" actId="47"/>
-        <pc:sldMkLst>
-          <pc:docMk/>
-          <pc:sldMk cId="0" sldId="343"/>
-        </pc:sldMkLst>
       </pc:sldChg>
       <pc:sldChg chg="addSp modSp add mod modNotes">
         <pc:chgData name="Lizethe Pérez Fuertes" userId="4ae9ef87-2a7d-42f8-8dfa-0a501a9e2ff4" providerId="ADAL" clId="{FDDD45CB-1330-4033-A842-3D2746AFF7C7}" dt="2026-08-11T22:22:35.117" v="911" actId="1076"/>
@@ -1081,46 +517,6 @@
             <ac:spMk id="6" creationId="{467FC619-6EA8-6075-9206-BA15434B7E9B}"/>
           </ac:spMkLst>
         </pc:spChg>
-        <pc:spChg chg="del">
-          <ac:chgData name="Lizethe Pérez Fuertes" userId="4ae9ef87-2a7d-42f8-8dfa-0a501a9e2ff4" providerId="ADAL" clId="{FDDD45CB-1330-4033-A842-3D2746AFF7C7}" dt="2026-08-11T17:37:08.935" v="113" actId="478"/>
-          <ac:spMkLst>
-            <pc:docMk/>
-            <pc:sldMk cId="222734393" sldId="345"/>
-            <ac:spMk id="7" creationId="{CDA60D20-F712-637D-AA85-A2C468C0B8E1}"/>
-          </ac:spMkLst>
-        </pc:spChg>
-        <pc:spChg chg="del">
-          <ac:chgData name="Lizethe Pérez Fuertes" userId="4ae9ef87-2a7d-42f8-8dfa-0a501a9e2ff4" providerId="ADAL" clId="{FDDD45CB-1330-4033-A842-3D2746AFF7C7}" dt="2026-08-11T17:37:08.935" v="113" actId="478"/>
-          <ac:spMkLst>
-            <pc:docMk/>
-            <pc:sldMk cId="222734393" sldId="345"/>
-            <ac:spMk id="8" creationId="{F26F3203-ABCB-6410-2799-A5F3740D2CBE}"/>
-          </ac:spMkLst>
-        </pc:spChg>
-        <pc:spChg chg="del">
-          <ac:chgData name="Lizethe Pérez Fuertes" userId="4ae9ef87-2a7d-42f8-8dfa-0a501a9e2ff4" providerId="ADAL" clId="{FDDD45CB-1330-4033-A842-3D2746AFF7C7}" dt="2026-08-11T17:37:08.935" v="113" actId="478"/>
-          <ac:spMkLst>
-            <pc:docMk/>
-            <pc:sldMk cId="222734393" sldId="345"/>
-            <ac:spMk id="9" creationId="{EF8B8E6F-A5B1-BC5C-D857-5819DF80B23E}"/>
-          </ac:spMkLst>
-        </pc:spChg>
-        <pc:picChg chg="del">
-          <ac:chgData name="Lizethe Pérez Fuertes" userId="4ae9ef87-2a7d-42f8-8dfa-0a501a9e2ff4" providerId="ADAL" clId="{FDDD45CB-1330-4033-A842-3D2746AFF7C7}" dt="2026-08-11T17:37:08.935" v="113" actId="478"/>
-          <ac:picMkLst>
-            <pc:docMk/>
-            <pc:sldMk cId="222734393" sldId="345"/>
-            <ac:picMk id="11" creationId="{E89C027F-ED68-1A3F-ED13-5FFCE04F97C0}"/>
-          </ac:picMkLst>
-        </pc:picChg>
-        <pc:picChg chg="del">
-          <ac:chgData name="Lizethe Pérez Fuertes" userId="4ae9ef87-2a7d-42f8-8dfa-0a501a9e2ff4" providerId="ADAL" clId="{FDDD45CB-1330-4033-A842-3D2746AFF7C7}" dt="2026-08-11T17:37:08.935" v="113" actId="478"/>
-          <ac:picMkLst>
-            <pc:docMk/>
-            <pc:sldMk cId="222734393" sldId="345"/>
-            <ac:picMk id="13" creationId="{5CD02EE0-0B21-39FB-0E28-EA0BAE110D7B}"/>
-          </ac:picMkLst>
-        </pc:picChg>
       </pc:sldChg>
       <pc:sldChg chg="addSp delSp modSp add mod">
         <pc:chgData name="Lizethe Pérez Fuertes" userId="4ae9ef87-2a7d-42f8-8dfa-0a501a9e2ff4" providerId="ADAL" clId="{FDDD45CB-1330-4033-A842-3D2746AFF7C7}" dt="2026-08-11T17:42:38.178" v="174" actId="14100"/>
@@ -1134,22 +530,6 @@
             <pc:docMk/>
             <pc:sldMk cId="1055148994" sldId="346"/>
             <ac:spMk id="2" creationId="{90092276-622F-ABDF-170E-05BB2F164FE8}"/>
-          </ac:spMkLst>
-        </pc:spChg>
-        <pc:spChg chg="del">
-          <ac:chgData name="Lizethe Pérez Fuertes" userId="4ae9ef87-2a7d-42f8-8dfa-0a501a9e2ff4" providerId="ADAL" clId="{FDDD45CB-1330-4033-A842-3D2746AFF7C7}" dt="2026-08-11T17:39:09.544" v="140" actId="478"/>
-          <ac:spMkLst>
-            <pc:docMk/>
-            <pc:sldMk cId="1055148994" sldId="346"/>
-            <ac:spMk id="3" creationId="{40D8227D-AC0F-7537-1650-3F653BBBC69D}"/>
-          </ac:spMkLst>
-        </pc:spChg>
-        <pc:spChg chg="del">
-          <ac:chgData name="Lizethe Pérez Fuertes" userId="4ae9ef87-2a7d-42f8-8dfa-0a501a9e2ff4" providerId="ADAL" clId="{FDDD45CB-1330-4033-A842-3D2746AFF7C7}" dt="2026-08-11T17:42:34.058" v="172" actId="478"/>
-          <ac:spMkLst>
-            <pc:docMk/>
-            <pc:sldMk cId="1055148994" sldId="346"/>
-            <ac:spMk id="5" creationId="{B3501294-610F-68F4-3A12-8B3AB5D1C97F}"/>
           </ac:spMkLst>
         </pc:spChg>
         <pc:spChg chg="mod">
@@ -1175,14 +555,6 @@
           <pc:docMk/>
           <pc:sldMk cId="4118520966" sldId="347"/>
         </pc:sldMkLst>
-        <pc:spChg chg="del">
-          <ac:chgData name="Lizethe Pérez Fuertes" userId="4ae9ef87-2a7d-42f8-8dfa-0a501a9e2ff4" providerId="ADAL" clId="{FDDD45CB-1330-4033-A842-3D2746AFF7C7}" dt="2026-08-11T17:43:10.577" v="211" actId="478"/>
-          <ac:spMkLst>
-            <pc:docMk/>
-            <pc:sldMk cId="4118520966" sldId="347"/>
-            <ac:spMk id="2" creationId="{3CDE1E13-5FBC-D3CE-CD32-9CAEDA0CD42D}"/>
-          </ac:spMkLst>
-        </pc:spChg>
         <pc:spChg chg="add mod">
           <ac:chgData name="Lizethe Pérez Fuertes" userId="4ae9ef87-2a7d-42f8-8dfa-0a501a9e2ff4" providerId="ADAL" clId="{FDDD45CB-1330-4033-A842-3D2746AFF7C7}" dt="2026-08-11T17:43:44.569" v="216" actId="1036"/>
           <ac:spMkLst>
@@ -1246,14 +618,6 @@
           <pc:docMk/>
           <pc:sldMk cId="2950979726" sldId="348"/>
         </pc:sldMkLst>
-        <pc:spChg chg="del">
-          <ac:chgData name="Lizethe Pérez Fuertes" userId="4ae9ef87-2a7d-42f8-8dfa-0a501a9e2ff4" providerId="ADAL" clId="{FDDD45CB-1330-4033-A842-3D2746AFF7C7}" dt="2026-08-11T17:44:39.305" v="231" actId="478"/>
-          <ac:spMkLst>
-            <pc:docMk/>
-            <pc:sldMk cId="2950979726" sldId="348"/>
-            <ac:spMk id="3" creationId="{169AD914-DFC0-9981-136C-EAB2B902C399}"/>
-          </ac:spMkLst>
-        </pc:spChg>
         <pc:spChg chg="add mod">
           <ac:chgData name="Lizethe Pérez Fuertes" userId="4ae9ef87-2a7d-42f8-8dfa-0a501a9e2ff4" providerId="ADAL" clId="{FDDD45CB-1330-4033-A842-3D2746AFF7C7}" dt="2026-08-11T17:47:40.566" v="264" actId="207"/>
           <ac:spMkLst>
@@ -1270,14 +634,6 @@
             <ac:spMk id="6" creationId="{20AEB5A1-AA02-2E59-8D31-3875B312D21D}"/>
           </ac:spMkLst>
         </pc:spChg>
-        <pc:spChg chg="add del">
-          <ac:chgData name="Lizethe Pérez Fuertes" userId="4ae9ef87-2a7d-42f8-8dfa-0a501a9e2ff4" providerId="ADAL" clId="{FDDD45CB-1330-4033-A842-3D2746AFF7C7}" dt="2026-08-11T17:46:00.190" v="243" actId="22"/>
-          <ac:spMkLst>
-            <pc:docMk/>
-            <pc:sldMk cId="2950979726" sldId="348"/>
-            <ac:spMk id="8" creationId="{643EB1D1-E218-D862-F7BB-66793B8E01F3}"/>
-          </ac:spMkLst>
-        </pc:spChg>
       </pc:sldChg>
       <pc:sldChg chg="delSp modSp add mod">
         <pc:chgData name="Lizethe Pérez Fuertes" userId="4ae9ef87-2a7d-42f8-8dfa-0a501a9e2ff4" providerId="ADAL" clId="{FDDD45CB-1330-4033-A842-3D2746AFF7C7}" dt="2026-08-11T18:05:03.172" v="553" actId="1076"/>
@@ -1285,38 +641,6 @@
           <pc:docMk/>
           <pc:sldMk cId="238418327" sldId="349"/>
         </pc:sldMkLst>
-        <pc:spChg chg="del mod">
-          <ac:chgData name="Lizethe Pérez Fuertes" userId="4ae9ef87-2a7d-42f8-8dfa-0a501a9e2ff4" providerId="ADAL" clId="{FDDD45CB-1330-4033-A842-3D2746AFF7C7}" dt="2026-08-11T18:04:11.612" v="542" actId="478"/>
-          <ac:spMkLst>
-            <pc:docMk/>
-            <pc:sldMk cId="238418327" sldId="349"/>
-            <ac:spMk id="10" creationId="{AFC1C031-A584-6561-E7C8-F5DFDB66B3F2}"/>
-          </ac:spMkLst>
-        </pc:spChg>
-        <pc:spChg chg="del">
-          <ac:chgData name="Lizethe Pérez Fuertes" userId="4ae9ef87-2a7d-42f8-8dfa-0a501a9e2ff4" providerId="ADAL" clId="{FDDD45CB-1330-4033-A842-3D2746AFF7C7}" dt="2026-08-11T18:04:11.612" v="542" actId="478"/>
-          <ac:spMkLst>
-            <pc:docMk/>
-            <pc:sldMk cId="238418327" sldId="349"/>
-            <ac:spMk id="12" creationId="{51070EDE-F7D1-91E0-E1B8-324890F960C4}"/>
-          </ac:spMkLst>
-        </pc:spChg>
-        <pc:spChg chg="del mod">
-          <ac:chgData name="Lizethe Pérez Fuertes" userId="4ae9ef87-2a7d-42f8-8dfa-0a501a9e2ff4" providerId="ADAL" clId="{FDDD45CB-1330-4033-A842-3D2746AFF7C7}" dt="2026-08-11T18:04:14.674" v="543" actId="478"/>
-          <ac:spMkLst>
-            <pc:docMk/>
-            <pc:sldMk cId="238418327" sldId="349"/>
-            <ac:spMk id="13" creationId="{489D4CC4-6471-7EA1-EF8E-68945C9B8397}"/>
-          </ac:spMkLst>
-        </pc:spChg>
-        <pc:spChg chg="del">
-          <ac:chgData name="Lizethe Pérez Fuertes" userId="4ae9ef87-2a7d-42f8-8dfa-0a501a9e2ff4" providerId="ADAL" clId="{FDDD45CB-1330-4033-A842-3D2746AFF7C7}" dt="2026-08-11T18:04:11.612" v="542" actId="478"/>
-          <ac:spMkLst>
-            <pc:docMk/>
-            <pc:sldMk cId="238418327" sldId="349"/>
-            <ac:spMk id="17" creationId="{0FC2A3DD-0D9D-E37E-AA60-7DC4DACD38B1}"/>
-          </ac:spMkLst>
-        </pc:spChg>
         <pc:spChg chg="mod">
           <ac:chgData name="Lizethe Pérez Fuertes" userId="4ae9ef87-2a7d-42f8-8dfa-0a501a9e2ff4" providerId="ADAL" clId="{FDDD45CB-1330-4033-A842-3D2746AFF7C7}" dt="2026-08-11T18:03:55.908" v="539" actId="20577"/>
           <ac:spMkLst>
@@ -1325,14 +649,6 @@
             <ac:spMk id="18" creationId="{438B228C-77DB-177D-4765-82F186231C06}"/>
           </ac:spMkLst>
         </pc:spChg>
-        <pc:grpChg chg="del">
-          <ac:chgData name="Lizethe Pérez Fuertes" userId="4ae9ef87-2a7d-42f8-8dfa-0a501a9e2ff4" providerId="ADAL" clId="{FDDD45CB-1330-4033-A842-3D2746AFF7C7}" dt="2026-08-11T18:04:21.185" v="545" actId="478"/>
-          <ac:grpSpMkLst>
-            <pc:docMk/>
-            <pc:sldMk cId="238418327" sldId="349"/>
-            <ac:grpSpMk id="15" creationId="{A0E3FFFE-12C0-4624-B989-FE6AB9584AB3}"/>
-          </ac:grpSpMkLst>
-        </pc:grpChg>
         <pc:graphicFrameChg chg="mod modGraphic">
           <ac:chgData name="Lizethe Pérez Fuertes" userId="4ae9ef87-2a7d-42f8-8dfa-0a501a9e2ff4" providerId="ADAL" clId="{FDDD45CB-1330-4033-A842-3D2746AFF7C7}" dt="2026-08-11T18:05:03.172" v="553" actId="1076"/>
           <ac:graphicFrameMkLst>
@@ -1348,14 +664,6 @@
           <pc:docMk/>
           <pc:sldMk cId="2616061273" sldId="350"/>
         </pc:sldMkLst>
-        <pc:spChg chg="del">
-          <ac:chgData name="Lizethe Pérez Fuertes" userId="4ae9ef87-2a7d-42f8-8dfa-0a501a9e2ff4" providerId="ADAL" clId="{FDDD45CB-1330-4033-A842-3D2746AFF7C7}" dt="2026-08-11T18:06:42.031" v="560" actId="478"/>
-          <ac:spMkLst>
-            <pc:docMk/>
-            <pc:sldMk cId="2616061273" sldId="350"/>
-            <ac:spMk id="10" creationId="{6E395F1D-1F7E-9B3A-4657-12AB3C3022EB}"/>
-          </ac:spMkLst>
-        </pc:spChg>
         <pc:spChg chg="mod">
           <ac:chgData name="Lizethe Pérez Fuertes" userId="4ae9ef87-2a7d-42f8-8dfa-0a501a9e2ff4" providerId="ADAL" clId="{FDDD45CB-1330-4033-A842-3D2746AFF7C7}" dt="2026-08-11T18:08:16.033" v="575" actId="1076"/>
           <ac:spMkLst>
@@ -1372,14 +680,6 @@
             <ac:spMk id="13" creationId="{993BC3A2-EFBF-FF6F-DE3E-B6CD478F88B4}"/>
           </ac:spMkLst>
         </pc:spChg>
-        <pc:spChg chg="del mod">
-          <ac:chgData name="Lizethe Pérez Fuertes" userId="4ae9ef87-2a7d-42f8-8dfa-0a501a9e2ff4" providerId="ADAL" clId="{FDDD45CB-1330-4033-A842-3D2746AFF7C7}" dt="2026-08-11T18:09:00.214" v="579" actId="478"/>
-          <ac:spMkLst>
-            <pc:docMk/>
-            <pc:sldMk cId="2616061273" sldId="350"/>
-            <ac:spMk id="17" creationId="{3C6B7D8D-D568-C08C-A1F5-8B16312BA6A1}"/>
-          </ac:spMkLst>
-        </pc:spChg>
         <pc:spChg chg="mod">
           <ac:chgData name="Lizethe Pérez Fuertes" userId="4ae9ef87-2a7d-42f8-8dfa-0a501a9e2ff4" providerId="ADAL" clId="{FDDD45CB-1330-4033-A842-3D2746AFF7C7}" dt="2026-08-11T18:06:40.081" v="559" actId="1076"/>
           <ac:spMkLst>
@@ -1388,14 +688,6 @@
             <ac:spMk id="18" creationId="{F4C2D6B6-0EF0-9A03-342C-074BDA126345}"/>
           </ac:spMkLst>
         </pc:spChg>
-        <pc:grpChg chg="del">
-          <ac:chgData name="Lizethe Pérez Fuertes" userId="4ae9ef87-2a7d-42f8-8dfa-0a501a9e2ff4" providerId="ADAL" clId="{FDDD45CB-1330-4033-A842-3D2746AFF7C7}" dt="2026-08-11T18:08:04.095" v="573" actId="478"/>
-          <ac:grpSpMkLst>
-            <pc:docMk/>
-            <pc:sldMk cId="2616061273" sldId="350"/>
-            <ac:grpSpMk id="15" creationId="{15BE559F-F93E-1B51-0DAB-0363AF067A82}"/>
-          </ac:grpSpMkLst>
-        </pc:grpChg>
         <pc:graphicFrameChg chg="mod modGraphic">
           <ac:chgData name="Lizethe Pérez Fuertes" userId="4ae9ef87-2a7d-42f8-8dfa-0a501a9e2ff4" providerId="ADAL" clId="{FDDD45CB-1330-4033-A842-3D2746AFF7C7}" dt="2026-08-11T18:08:12.355" v="574" actId="1076"/>
           <ac:graphicFrameMkLst>
@@ -1419,30 +711,6 @@
             <ac:spMk id="3" creationId="{B76909EC-09B9-DDE4-2174-D97FA306AA25}"/>
           </ac:spMkLst>
         </pc:spChg>
-        <pc:spChg chg="del">
-          <ac:chgData name="Lizethe Pérez Fuertes" userId="4ae9ef87-2a7d-42f8-8dfa-0a501a9e2ff4" providerId="ADAL" clId="{FDDD45CB-1330-4033-A842-3D2746AFF7C7}" dt="2026-08-11T18:10:01.688" v="627" actId="478"/>
-          <ac:spMkLst>
-            <pc:docMk/>
-            <pc:sldMk cId="2763501894" sldId="351"/>
-            <ac:spMk id="7" creationId="{06F9C010-C80D-BA67-11E1-6B916284EEA8}"/>
-          </ac:spMkLst>
-        </pc:spChg>
-        <pc:graphicFrameChg chg="del">
-          <ac:chgData name="Lizethe Pérez Fuertes" userId="4ae9ef87-2a7d-42f8-8dfa-0a501a9e2ff4" providerId="ADAL" clId="{FDDD45CB-1330-4033-A842-3D2746AFF7C7}" dt="2026-08-11T18:10:01.688" v="627" actId="478"/>
-          <ac:graphicFrameMkLst>
-            <pc:docMk/>
-            <pc:sldMk cId="2763501894" sldId="351"/>
-            <ac:graphicFrameMk id="6" creationId="{C0550B80-B383-5444-1511-D9FC34DCE21C}"/>
-          </ac:graphicFrameMkLst>
-        </pc:graphicFrameChg>
-        <pc:picChg chg="del">
-          <ac:chgData name="Lizethe Pérez Fuertes" userId="4ae9ef87-2a7d-42f8-8dfa-0a501a9e2ff4" providerId="ADAL" clId="{FDDD45CB-1330-4033-A842-3D2746AFF7C7}" dt="2026-08-11T18:10:03.806" v="628" actId="478"/>
-          <ac:picMkLst>
-            <pc:docMk/>
-            <pc:sldMk cId="2763501894" sldId="351"/>
-            <ac:picMk id="4" creationId="{0118F5AE-4B08-87EB-E0CA-53006ADE1269}"/>
-          </ac:picMkLst>
-        </pc:picChg>
         <pc:picChg chg="add mod">
           <ac:chgData name="Lizethe Pérez Fuertes" userId="4ae9ef87-2a7d-42f8-8dfa-0a501a9e2ff4" providerId="ADAL" clId="{FDDD45CB-1330-4033-A842-3D2746AFF7C7}" dt="2026-08-11T18:10:31.883" v="637" actId="1076"/>
           <ac:picMkLst>
@@ -1460,97 +728,18 @@
           </ac:picMkLst>
         </pc:picChg>
       </pc:sldChg>
-      <pc:sldChg chg="addSp delSp modSp add del mod">
-        <pc:chgData name="Lizethe Pérez Fuertes" userId="4ae9ef87-2a7d-42f8-8dfa-0a501a9e2ff4" providerId="ADAL" clId="{FDDD45CB-1330-4033-A842-3D2746AFF7C7}" dt="2026-08-11T22:22:00.617" v="903" actId="47"/>
-        <pc:sldMkLst>
-          <pc:docMk/>
-          <pc:sldMk cId="3022900638" sldId="352"/>
-        </pc:sldMkLst>
-        <pc:spChg chg="mod">
-          <ac:chgData name="Lizethe Pérez Fuertes" userId="4ae9ef87-2a7d-42f8-8dfa-0a501a9e2ff4" providerId="ADAL" clId="{FDDD45CB-1330-4033-A842-3D2746AFF7C7}" dt="2026-08-11T18:11:21.931" v="682" actId="6549"/>
-          <ac:spMkLst>
-            <pc:docMk/>
-            <pc:sldMk cId="3022900638" sldId="352"/>
-            <ac:spMk id="3" creationId="{17960639-CE04-C139-F3D4-6607F30633E7}"/>
-          </ac:spMkLst>
-        </pc:spChg>
-        <pc:spChg chg="add">
-          <ac:chgData name="Lizethe Pérez Fuertes" userId="4ae9ef87-2a7d-42f8-8dfa-0a501a9e2ff4" providerId="ADAL" clId="{FDDD45CB-1330-4033-A842-3D2746AFF7C7}" dt="2026-08-11T18:11:34.900" v="684" actId="22"/>
-          <ac:spMkLst>
-            <pc:docMk/>
-            <pc:sldMk cId="3022900638" sldId="352"/>
-            <ac:spMk id="4" creationId="{F99BBEC5-2A3B-2969-DEC7-6857ADF67628}"/>
-          </ac:spMkLst>
-        </pc:spChg>
-        <pc:graphicFrameChg chg="add mod modGraphic">
-          <ac:chgData name="Lizethe Pérez Fuertes" userId="4ae9ef87-2a7d-42f8-8dfa-0a501a9e2ff4" providerId="ADAL" clId="{FDDD45CB-1330-4033-A842-3D2746AFF7C7}" dt="2026-08-11T18:12:02.920" v="687" actId="14100"/>
-          <ac:graphicFrameMkLst>
-            <pc:docMk/>
-            <pc:sldMk cId="3022900638" sldId="352"/>
-            <ac:graphicFrameMk id="7" creationId="{FBF8509B-ED54-E6B3-E3B1-2C820B961086}"/>
-          </ac:graphicFrameMkLst>
-        </pc:graphicFrameChg>
-        <pc:graphicFrameChg chg="add">
-          <ac:chgData name="Lizethe Pérez Fuertes" userId="4ae9ef87-2a7d-42f8-8dfa-0a501a9e2ff4" providerId="ADAL" clId="{FDDD45CB-1330-4033-A842-3D2746AFF7C7}" dt="2026-08-11T18:11:34.900" v="684" actId="22"/>
-          <ac:graphicFrameMkLst>
-            <pc:docMk/>
-            <pc:sldMk cId="3022900638" sldId="352"/>
-            <ac:graphicFrameMk id="10" creationId="{0F423C72-2E36-C389-3FFF-9D3A1A9BC889}"/>
-          </ac:graphicFrameMkLst>
-        </pc:graphicFrameChg>
-        <pc:graphicFrameChg chg="add">
-          <ac:chgData name="Lizethe Pérez Fuertes" userId="4ae9ef87-2a7d-42f8-8dfa-0a501a9e2ff4" providerId="ADAL" clId="{FDDD45CB-1330-4033-A842-3D2746AFF7C7}" dt="2026-08-11T18:11:34.900" v="684" actId="22"/>
-          <ac:graphicFrameMkLst>
-            <pc:docMk/>
-            <pc:sldMk cId="3022900638" sldId="352"/>
-            <ac:graphicFrameMk id="12" creationId="{25AB7222-B9CB-3002-222C-ED67A78CCF70}"/>
-          </ac:graphicFrameMkLst>
-        </pc:graphicFrameChg>
-        <pc:picChg chg="del">
-          <ac:chgData name="Lizethe Pérez Fuertes" userId="4ae9ef87-2a7d-42f8-8dfa-0a501a9e2ff4" providerId="ADAL" clId="{FDDD45CB-1330-4033-A842-3D2746AFF7C7}" dt="2026-08-11T18:11:34.312" v="683" actId="478"/>
-          <ac:picMkLst>
-            <pc:docMk/>
-            <pc:sldMk cId="3022900638" sldId="352"/>
-            <ac:picMk id="5" creationId="{4BDAAB56-0558-67C0-9177-213FD61C9E84}"/>
-          </ac:picMkLst>
-        </pc:picChg>
-        <pc:picChg chg="del">
-          <ac:chgData name="Lizethe Pérez Fuertes" userId="4ae9ef87-2a7d-42f8-8dfa-0a501a9e2ff4" providerId="ADAL" clId="{FDDD45CB-1330-4033-A842-3D2746AFF7C7}" dt="2026-08-11T18:11:34.312" v="683" actId="478"/>
-          <ac:picMkLst>
-            <pc:docMk/>
-            <pc:sldMk cId="3022900638" sldId="352"/>
-            <ac:picMk id="9" creationId="{BCDD11CE-57BB-F95E-CB99-C36DCD3E6C05}"/>
-          </ac:picMkLst>
-        </pc:picChg>
-      </pc:sldChg>
       <pc:sldChg chg="addSp delSp modSp add mod">
         <pc:chgData name="Lizethe Pérez Fuertes" userId="4ae9ef87-2a7d-42f8-8dfa-0a501a9e2ff4" providerId="ADAL" clId="{FDDD45CB-1330-4033-A842-3D2746AFF7C7}" dt="2026-08-11T22:21:38.284" v="898" actId="1076"/>
         <pc:sldMkLst>
           <pc:docMk/>
           <pc:sldMk cId="3957193108" sldId="353"/>
         </pc:sldMkLst>
-        <pc:spChg chg="del">
-          <ac:chgData name="Lizethe Pérez Fuertes" userId="4ae9ef87-2a7d-42f8-8dfa-0a501a9e2ff4" providerId="ADAL" clId="{FDDD45CB-1330-4033-A842-3D2746AFF7C7}" dt="2026-08-11T22:21:29.547" v="895" actId="478"/>
-          <ac:spMkLst>
-            <pc:docMk/>
-            <pc:sldMk cId="3957193108" sldId="353"/>
-            <ac:spMk id="3" creationId="{08318054-1493-87FA-A9FB-D922AEEE31F8}"/>
-          </ac:spMkLst>
-        </pc:spChg>
         <pc:spChg chg="add mod">
           <ac:chgData name="Lizethe Pérez Fuertes" userId="4ae9ef87-2a7d-42f8-8dfa-0a501a9e2ff4" providerId="ADAL" clId="{FDDD45CB-1330-4033-A842-3D2746AFF7C7}" dt="2026-08-11T22:21:33.399" v="897" actId="1076"/>
           <ac:spMkLst>
             <pc:docMk/>
             <pc:sldMk cId="3957193108" sldId="353"/>
             <ac:spMk id="5" creationId="{CC77D2E1-9A85-41C6-EF5D-DDEFEA17F998}"/>
-          </ac:spMkLst>
-        </pc:spChg>
-        <pc:spChg chg="del">
-          <ac:chgData name="Lizethe Pérez Fuertes" userId="4ae9ef87-2a7d-42f8-8dfa-0a501a9e2ff4" providerId="ADAL" clId="{FDDD45CB-1330-4033-A842-3D2746AFF7C7}" dt="2026-08-11T22:21:04.200" v="890" actId="478"/>
-          <ac:spMkLst>
-            <pc:docMk/>
-            <pc:sldMk cId="3957193108" sldId="353"/>
-            <ac:spMk id="10" creationId="{D9832F87-E0A9-C761-2818-42BD5AA50D55}"/>
           </ac:spMkLst>
         </pc:spChg>
         <pc:picChg chg="add mod">
@@ -1568,14 +757,6 @@
           <pc:docMk/>
           <pc:sldMasterMk cId="1000699671" sldId="2147483648"/>
         </pc:sldMasterMkLst>
-        <pc:sldLayoutChg chg="del">
-          <pc:chgData name="Lizethe Pérez Fuertes" userId="4ae9ef87-2a7d-42f8-8dfa-0a501a9e2ff4" providerId="ADAL" clId="{FDDD45CB-1330-4033-A842-3D2746AFF7C7}" dt="2026-08-11T17:38:36.060" v="127" actId="47"/>
-          <pc:sldLayoutMkLst>
-            <pc:docMk/>
-            <pc:sldMasterMk cId="1000699671" sldId="2147483648"/>
-            <pc:sldLayoutMk cId="2173744485" sldId="2147483662"/>
-          </pc:sldLayoutMkLst>
-        </pc:sldLayoutChg>
       </pc:sldMasterChg>
     </pc:docChg>
   </pc:docChgLst>
@@ -1664,7 +845,7 @@
           <a:p>
             <a:fld id="{63B9EA85-E274-4EA7-8880-BB3ECF55DB78}" type="datetimeFigureOut">
               <a:rPr lang="es-MX" smtClean="0"/>
-              <a:t>11/08/2026</a:t>
+              <a:t>30/08/2026</a:t>
             </a:fld>
             <a:endParaRPr lang="es-MX" dirty="0"/>
           </a:p>
@@ -3046,7 +2227,7 @@
           <a:p>
             <a:fld id="{8B911FAC-B3FF-46B8-811B-635049FACAEC}" type="datetimeFigureOut">
               <a:rPr lang="es-MX" smtClean="0"/>
-              <a:t>11/08/2026</a:t>
+              <a:t>30/08/2026</a:t>
             </a:fld>
             <a:endParaRPr lang="es-MX" dirty="0"/>
           </a:p>
@@ -3216,7 +2397,7 @@
           <a:p>
             <a:fld id="{8B911FAC-B3FF-46B8-811B-635049FACAEC}" type="datetimeFigureOut">
               <a:rPr lang="es-MX" smtClean="0"/>
-              <a:t>11/08/2026</a:t>
+              <a:t>30/08/2026</a:t>
             </a:fld>
             <a:endParaRPr lang="es-MX" dirty="0"/>
           </a:p>
@@ -3396,7 +2577,7 @@
           <a:p>
             <a:fld id="{8B911FAC-B3FF-46B8-811B-635049FACAEC}" type="datetimeFigureOut">
               <a:rPr lang="es-MX" smtClean="0"/>
-              <a:t>11/08/2026</a:t>
+              <a:t>30/08/2026</a:t>
             </a:fld>
             <a:endParaRPr lang="es-MX" dirty="0"/>
           </a:p>
@@ -3549,7 +2730,7 @@
           <a:p>
             <a:fld id="{1D8BD707-D9CF-40AE-B4C6-C98DA3205C09}" type="datetimeFigureOut">
               <a:rPr lang="en-US" smtClean="0"/>
-              <a:t>8/11/2026</a:t>
+              <a:t>8/30/2026</a:t>
             </a:fld>
             <a:endParaRPr lang="en-US"/>
           </a:p>
@@ -3673,7 +2854,7 @@
           <a:p>
             <a:fld id="{1D8BD707-D9CF-40AE-B4C6-C98DA3205C09}" type="datetimeFigureOut">
               <a:rPr lang="en-US"/>
-              <a:t>8/11/2026</a:t>
+              <a:t>8/30/2026</a:t>
             </a:fld>
             <a:endParaRPr lang="en-US"/>
           </a:p>
@@ -3833,7 +3014,7 @@
           <a:p>
             <a:fld id="{8B911FAC-B3FF-46B8-811B-635049FACAEC}" type="datetimeFigureOut">
               <a:rPr lang="es-MX" smtClean="0"/>
-              <a:t>11/08/2026</a:t>
+              <a:t>30/08/2026</a:t>
             </a:fld>
             <a:endParaRPr lang="es-MX" dirty="0"/>
           </a:p>
@@ -4079,7 +3260,7 @@
           <a:p>
             <a:fld id="{8B911FAC-B3FF-46B8-811B-635049FACAEC}" type="datetimeFigureOut">
               <a:rPr lang="es-MX" smtClean="0"/>
-              <a:t>11/08/2026</a:t>
+              <a:t>30/08/2026</a:t>
             </a:fld>
             <a:endParaRPr lang="es-MX" dirty="0"/>
           </a:p>
@@ -4367,7 +3548,7 @@
           <a:p>
             <a:fld id="{8B911FAC-B3FF-46B8-811B-635049FACAEC}" type="datetimeFigureOut">
               <a:rPr lang="es-MX" smtClean="0"/>
-              <a:t>11/08/2026</a:t>
+              <a:t>30/08/2026</a:t>
             </a:fld>
             <a:endParaRPr lang="es-MX" dirty="0"/>
           </a:p>
@@ -4789,7 +3970,7 @@
           <a:p>
             <a:fld id="{8B911FAC-B3FF-46B8-811B-635049FACAEC}" type="datetimeFigureOut">
               <a:rPr lang="es-MX" smtClean="0"/>
-              <a:t>11/08/2026</a:t>
+              <a:t>30/08/2026</a:t>
             </a:fld>
             <a:endParaRPr lang="es-MX" dirty="0"/>
           </a:p>
@@ -4907,7 +4088,7 @@
           <a:p>
             <a:fld id="{8B911FAC-B3FF-46B8-811B-635049FACAEC}" type="datetimeFigureOut">
               <a:rPr lang="es-MX" smtClean="0"/>
-              <a:t>11/08/2026</a:t>
+              <a:t>30/08/2026</a:t>
             </a:fld>
             <a:endParaRPr lang="es-MX" dirty="0"/>
           </a:p>
@@ -5002,7 +4183,7 @@
           <a:p>
             <a:fld id="{8B911FAC-B3FF-46B8-811B-635049FACAEC}" type="datetimeFigureOut">
               <a:rPr lang="es-MX" smtClean="0"/>
-              <a:t>11/08/2026</a:t>
+              <a:t>30/08/2026</a:t>
             </a:fld>
             <a:endParaRPr lang="es-MX" dirty="0"/>
           </a:p>
@@ -5279,7 +4460,7 @@
           <a:p>
             <a:fld id="{8B911FAC-B3FF-46B8-811B-635049FACAEC}" type="datetimeFigureOut">
               <a:rPr lang="es-MX" smtClean="0"/>
-              <a:t>11/08/2026</a:t>
+              <a:t>30/08/2026</a:t>
             </a:fld>
             <a:endParaRPr lang="es-MX" dirty="0"/>
           </a:p>
@@ -5532,7 +4713,7 @@
           <a:p>
             <a:fld id="{8B911FAC-B3FF-46B8-811B-635049FACAEC}" type="datetimeFigureOut">
               <a:rPr lang="es-MX" smtClean="0"/>
-              <a:t>11/08/2026</a:t>
+              <a:t>30/08/2026</a:t>
             </a:fld>
             <a:endParaRPr lang="es-MX" dirty="0"/>
           </a:p>
@@ -5745,7 +4926,7 @@
           <a:p>
             <a:fld id="{8B911FAC-B3FF-46B8-811B-635049FACAEC}" type="datetimeFigureOut">
               <a:rPr lang="es-MX" smtClean="0"/>
-              <a:t>11/08/2026</a:t>
+              <a:t>30/08/2026</a:t>
             </a:fld>
             <a:endParaRPr lang="es-MX" dirty="0"/>
           </a:p>
@@ -12797,13 +11978,37 @@
             </a:r>
             <a:r>
               <a:rPr lang="es-MX" sz="1650" dirty="0"/>
-              <a:t> = [20.45, 20.32, 19.94, 20.13, 19.49, 18.95, 18.81, 18.75, 18.36]</a:t>
-            </a:r>
-          </a:p>
-          <a:p>
+              <a:t> = [17.15, 17.08, 17.22, 17.10, 17.05, 16.98, 16.92, 17.02, </a:t>
+            </a:r>
+            <a:r>
+              <a:rPr lang="es-MX" sz="1650" dirty="0">
+                <a:highlight>
+                  <a:srgbClr val="FFFF00"/>
+                </a:highlight>
+              </a:rPr>
+              <a:t>Sept</a:t>
+            </a:r>
             <a:r>
               <a:rPr lang="es-MX" sz="1650" dirty="0"/>
-              <a:t>euro =  [21.06, 21.32, 21.69, 22.73, 21.81, 21.87, 21.83, 21.95, 21.60]</a:t>
+              <a:t>]</a:t>
+            </a:r>
+          </a:p>
+          <a:p>
+            <a:r>
+              <a:rPr lang="es-MX" sz="1650" dirty="0"/>
+              <a:t>euro =  [20.09, 20.18, 19.90, 20.04, 19.91, 19.51, 19.30, 19.70, </a:t>
+            </a:r>
+            <a:r>
+              <a:rPr lang="es-MX" sz="1650" dirty="0">
+                <a:highlight>
+                  <a:srgbClr val="FFFF00"/>
+                </a:highlight>
+              </a:rPr>
+              <a:t>Sept</a:t>
+            </a:r>
+            <a:r>
+              <a:rPr lang="es-MX" sz="1650" dirty="0"/>
+              <a:t>]</a:t>
             </a:r>
           </a:p>
         </p:txBody>
